--- a/classes/parte-9-forense-digital-y-respuesta-a-incidentes/220-caso-completo-de-respuesta-a-incidentes-end-to-end/clase-220-presentacion.pptx
+++ b/classes/parte-9-forense-digital-y-respuesta-a-incidentes/220-caso-completo-de-respuesta-a-incidentes-end-to-end/clase-220-presentacion.pptx
@@ -3617,6 +3617,21 @@
               <a:t>•  Formula tres acciones correctivas contra causas raíz.</a:t>
             </a:r>
           </a:p>
+          <a:p>
+            <a:pPr>
+              <a:spcAft>
+                <a:spcPts val="600"/>
+              </a:spcAft>
+            </a:pPr>
+            <a:r>
+              <a:rPr sz="1500">
+                <a:solidFill>
+                  <a:srgbClr val="22282E"/>
+                </a:solidFill>
+              </a:rPr>
+              <a:t>•  Para el caso viral, explica qué demuestra un TXID y qué fuentes faltan para atribuir operador, intención o legitimidad.</a:t>
+            </a:r>
+          </a:p>
         </p:txBody>
       </p:sp>
     </p:spTree>
@@ -3868,6 +3883,36 @@
                 </a:solidFill>
               </a:rPr>
               <a:t>•  Informe no reproducible — Faltan hashes/versiones. Documenta la metodología completa.</a:t>
+            </a:r>
+          </a:p>
+          <a:p>
+            <a:pPr>
+              <a:spcAft>
+                <a:spcPts val="600"/>
+              </a:spcAft>
+            </a:pPr>
+            <a:r>
+              <a:rPr sz="1500">
+                <a:solidFill>
+                  <a:srgbClr val="22282E"/>
+                </a:solidFill>
+              </a:rPr>
+              <a:t>•  Forzar el playbook de malware a otro incidente — Adquiere las fuentes que responden la pregunta: identidad, navegador, wallet y cadena pueden ser centrales.</a:t>
+            </a:r>
+          </a:p>
+          <a:p>
+            <a:pPr>
+              <a:spcAft>
+                <a:spcPts val="600"/>
+              </a:spcAft>
+            </a:pPr>
+            <a:r>
+              <a:rPr sz="1500">
+                <a:solidFill>
+                  <a:srgbClr val="22282E"/>
+                </a:solidFill>
+              </a:rPr>
+              <a:t>•  Resetear o migrar antes de preservar — La urgencia no elimina la trazabilidad; registra lo viable sin retrasar una contención crítica.</a:t>
             </a:r>
           </a:p>
         </p:txBody>
@@ -4541,6 +4586,21 @@
               <a:t>•  Entregar un informe forense y un post-mortem defendibles.</a:t>
             </a:r>
           </a:p>
+          <a:p>
+            <a:pPr>
+              <a:spcAft>
+                <a:spcPts val="600"/>
+              </a:spcAft>
+            </a:pPr>
+            <a:r>
+              <a:rPr sz="1500">
+                <a:solidFill>
+                  <a:srgbClr val="22282E"/>
+                </a:solidFill>
+              </a:rPr>
+              <a:t>•  Adaptar el método a incidentes centrados en identidad, navegador, wallet y evidencia transaccional sin forzar artefactos de disco o memoria inexistentes.</a:t>
+            </a:r>
+          </a:p>
         </p:txBody>
       </p:sp>
     </p:spTree>
@@ -5374,6 +5434,66 @@
                 </a:solidFill>
               </a:rPr>
               <a:t>•  El RCA encuentra privilegio excesivo y telemetría cloud incompleta como condiciones contribuyentes. Las acciones incluyen privilegio temporal, habilitación de data events relevantes y prueba de una…</a:t>
+            </a:r>
+          </a:p>
+          <a:p>
+            <a:pPr>
+              <a:spcAft>
+                <a:spcPts val="600"/>
+              </a:spcAft>
+            </a:pPr>
+            <a:r>
+              <a:rPr sz="1500">
+                <a:solidFill>
+                  <a:srgbClr val="22282E"/>
+                </a:solidFill>
+              </a:rPr>
+              <a:t>•  Un incidente puede comenzar con un video y terminar en un movimiento de activos sin que exista</a:t>
+            </a:r>
+          </a:p>
+          <a:p>
+            <a:pPr>
+              <a:spcAft>
+                <a:spcPts val="600"/>
+              </a:spcAft>
+            </a:pPr>
+            <a:r>
+              <a:rPr sz="1500">
+                <a:solidFill>
+                  <a:srgbClr val="22282E"/>
+                </a:solidFill>
+              </a:rPr>
+              <a:t>•  PowerShell, C2 o persistencia. El alcance inicial incluye publicación, cuentas sociales, dominio,</a:t>
+            </a:r>
+          </a:p>
+          <a:p>
+            <a:pPr>
+              <a:spcAft>
+                <a:spcPts val="600"/>
+              </a:spcAft>
+            </a:pPr>
+            <a:r>
+              <a:rPr sz="1500">
+                <a:solidFill>
+                  <a:srgbClr val="22282E"/>
+                </a:solidFill>
+              </a:rPr>
+              <a:t>•  perfil de navegador, exportación de la wallet, datos de la petición firmada y observación de cadena.</a:t>
+            </a:r>
+          </a:p>
+          <a:p>
+            <a:pPr>
+              <a:spcAft>
+                <a:spcPts val="600"/>
+              </a:spcAft>
+            </a:pPr>
+            <a:r>
+              <a:rPr sz="1500">
+                <a:solidFill>
+                  <a:srgbClr val="22282E"/>
+                </a:solidFill>
+              </a:rPr>
+              <a:t>•  Si además aparece sustitución del portapapeles, se añade el endpoint y su evidencia volátil; no se</a:t>
             </a:r>
           </a:p>
         </p:txBody>
